--- a/Agenda.pptx
+++ b/Agenda.pptx
@@ -70,25 +70,7 @@
                 </a:solidFill>
                 <a:latin typeface="Arial"/>
               </a:rPr>
-              <a:t>Cliquez pour </a:t>
-            </a:r>
-            <a:r>
-              <a:rPr b="0" lang="fr-FR" sz="4400" spc="-1" strike="noStrike">
-                <a:solidFill>
-                  <a:srgbClr val="000000"/>
-                </a:solidFill>
-                <a:latin typeface="Arial"/>
-              </a:rPr>
-              <a:t>déplacer la </a:t>
-            </a:r>
-            <a:r>
-              <a:rPr b="0" lang="fr-FR" sz="4400" spc="-1" strike="noStrike">
-                <a:solidFill>
-                  <a:srgbClr val="000000"/>
-                </a:solidFill>
-                <a:latin typeface="Arial"/>
-              </a:rPr>
-              <a:t>diapo</a:t>
+              <a:t>Cliquez pour déplacer la diapo</a:t>
             </a:r>
             <a:endParaRPr b="0" lang="fr-FR" sz="4400" spc="-1" strike="noStrike">
               <a:solidFill>
@@ -137,169 +119,7 @@
                 </a:solidFill>
                 <a:latin typeface="Arial"/>
               </a:rPr>
-              <a:t>Cliq</a:t>
-            </a:r>
-            <a:r>
-              <a:rPr b="0" lang="fr-FR" sz="2000" spc="-1" strike="noStrike">
-                <a:solidFill>
-                  <a:srgbClr val="000000"/>
-                </a:solidFill>
-                <a:latin typeface="Arial"/>
-              </a:rPr>
-              <a:t>ue</a:t>
-            </a:r>
-            <a:r>
-              <a:rPr b="0" lang="fr-FR" sz="2000" spc="-1" strike="noStrike">
-                <a:solidFill>
-                  <a:srgbClr val="000000"/>
-                </a:solidFill>
-                <a:latin typeface="Arial"/>
-              </a:rPr>
-              <a:t>z </a:t>
-            </a:r>
-            <a:r>
-              <a:rPr b="0" lang="fr-FR" sz="2000" spc="-1" strike="noStrike">
-                <a:solidFill>
-                  <a:srgbClr val="000000"/>
-                </a:solidFill>
-                <a:latin typeface="Arial"/>
-              </a:rPr>
-              <a:t>po</a:t>
-            </a:r>
-            <a:r>
-              <a:rPr b="0" lang="fr-FR" sz="2000" spc="-1" strike="noStrike">
-                <a:solidFill>
-                  <a:srgbClr val="000000"/>
-                </a:solidFill>
-                <a:latin typeface="Arial"/>
-              </a:rPr>
-              <a:t>ur </a:t>
-            </a:r>
-            <a:r>
-              <a:rPr b="0" lang="fr-FR" sz="2000" spc="-1" strike="noStrike">
-                <a:solidFill>
-                  <a:srgbClr val="000000"/>
-                </a:solidFill>
-                <a:latin typeface="Arial"/>
-              </a:rPr>
-              <a:t>m</a:t>
-            </a:r>
-            <a:r>
-              <a:rPr b="0" lang="fr-FR" sz="2000" spc="-1" strike="noStrike">
-                <a:solidFill>
-                  <a:srgbClr val="000000"/>
-                </a:solidFill>
-                <a:latin typeface="Arial"/>
-              </a:rPr>
-              <a:t>od</a:t>
-            </a:r>
-            <a:r>
-              <a:rPr b="0" lang="fr-FR" sz="2000" spc="-1" strike="noStrike">
-                <a:solidFill>
-                  <a:srgbClr val="000000"/>
-                </a:solidFill>
-                <a:latin typeface="Arial"/>
-              </a:rPr>
-              <a:t>ifi</a:t>
-            </a:r>
-            <a:r>
-              <a:rPr b="0" lang="fr-FR" sz="2000" spc="-1" strike="noStrike">
-                <a:solidFill>
-                  <a:srgbClr val="000000"/>
-                </a:solidFill>
-                <a:latin typeface="Arial"/>
-              </a:rPr>
-              <a:t>er </a:t>
-            </a:r>
-            <a:r>
-              <a:rPr b="0" lang="fr-FR" sz="2000" spc="-1" strike="noStrike">
-                <a:solidFill>
-                  <a:srgbClr val="000000"/>
-                </a:solidFill>
-                <a:latin typeface="Arial"/>
-              </a:rPr>
-              <a:t>le </a:t>
-            </a:r>
-            <a:r>
-              <a:rPr b="0" lang="fr-FR" sz="2000" spc="-1" strike="noStrike">
-                <a:solidFill>
-                  <a:srgbClr val="000000"/>
-                </a:solidFill>
-                <a:latin typeface="Arial"/>
-              </a:rPr>
-              <a:t>fo</a:t>
-            </a:r>
-            <a:r>
-              <a:rPr b="0" lang="fr-FR" sz="2000" spc="-1" strike="noStrike">
-                <a:solidFill>
-                  <a:srgbClr val="000000"/>
-                </a:solidFill>
-                <a:latin typeface="Arial"/>
-              </a:rPr>
-              <a:t>r</a:t>
-            </a:r>
-            <a:r>
-              <a:rPr b="0" lang="fr-FR" sz="2000" spc="-1" strike="noStrike">
-                <a:solidFill>
-                  <a:srgbClr val="000000"/>
-                </a:solidFill>
-                <a:latin typeface="Arial"/>
-              </a:rPr>
-              <a:t>m</a:t>
-            </a:r>
-            <a:r>
-              <a:rPr b="0" lang="fr-FR" sz="2000" spc="-1" strike="noStrike">
-                <a:solidFill>
-                  <a:srgbClr val="000000"/>
-                </a:solidFill>
-                <a:latin typeface="Arial"/>
-              </a:rPr>
-              <a:t>at </a:t>
-            </a:r>
-            <a:r>
-              <a:rPr b="0" lang="fr-FR" sz="2000" spc="-1" strike="noStrike">
-                <a:solidFill>
-                  <a:srgbClr val="000000"/>
-                </a:solidFill>
-                <a:latin typeface="Arial"/>
-              </a:rPr>
-              <a:t>de</a:t>
-            </a:r>
-            <a:r>
-              <a:rPr b="0" lang="fr-FR" sz="2000" spc="-1" strike="noStrike">
-                <a:solidFill>
-                  <a:srgbClr val="000000"/>
-                </a:solidFill>
-                <a:latin typeface="Arial"/>
-              </a:rPr>
-              <a:t>s </a:t>
-            </a:r>
-            <a:r>
-              <a:rPr b="0" lang="fr-FR" sz="2000" spc="-1" strike="noStrike">
-                <a:solidFill>
-                  <a:srgbClr val="000000"/>
-                </a:solidFill>
-                <a:latin typeface="Arial"/>
-              </a:rPr>
-              <a:t>no</a:t>
-            </a:r>
-            <a:r>
-              <a:rPr b="0" lang="fr-FR" sz="2000" spc="-1" strike="noStrike">
-                <a:solidFill>
-                  <a:srgbClr val="000000"/>
-                </a:solidFill>
-                <a:latin typeface="Arial"/>
-              </a:rPr>
-              <a:t>te</a:t>
-            </a:r>
-            <a:r>
-              <a:rPr b="0" lang="fr-FR" sz="2000" spc="-1" strike="noStrike">
-                <a:solidFill>
-                  <a:srgbClr val="000000"/>
-                </a:solidFill>
-                <a:latin typeface="Arial"/>
-              </a:rPr>
-              <a:t>s</a:t>
+              <a:t>Cliquez pour modifier le format des notes</a:t>
             </a:r>
             <a:endParaRPr b="0" lang="fr-FR" sz="2000" spc="-1" strike="noStrike">
               <a:solidFill>
@@ -521,7 +341,7 @@
             <a:pPr indent="0" algn="r">
               <a:buNone/>
             </a:pPr>
-            <a:fld id="{DA6BBA50-473A-4F94-AD21-AFA5195746CF}" type="slidenum">
+            <a:fld id="{07DF32DC-3852-4738-8D00-2C2653579E06}" type="slidenum">
               <a:rPr b="0" lang="fr-FR" sz="1400" spc="-1" strike="noStrike">
                 <a:solidFill>
                   <a:srgbClr val="000000"/>
@@ -680,7 +500,7 @@
                 <a:tab algn="l" pos="0"/>
               </a:tabLst>
             </a:pPr>
-            <a:fld id="{F0BCEB5B-EDAB-4652-B9F1-E492A0485E8C}" type="slidenum">
+            <a:fld id="{E90507B3-7EF8-44C3-BE3A-AF86B238963D}" type="slidenum">
               <a:rPr b="0" lang="en-US" sz="1200" spc="-1" strike="noStrike">
                 <a:solidFill>
                   <a:schemeClr val="dk1"/>
@@ -839,7 +659,7 @@
                 <a:tab algn="l" pos="0"/>
               </a:tabLst>
             </a:pPr>
-            <a:fld id="{5B85E692-983F-4A3F-A763-EC26A5AF5507}" type="slidenum">
+            <a:fld id="{48DA028C-54C4-460C-B267-CCED9F2A6A66}" type="slidenum">
               <a:rPr b="0" lang="en-US" sz="1200" spc="-1" strike="noStrike">
                 <a:solidFill>
                   <a:schemeClr val="dk1"/>
@@ -969,34 +789,7 @@
                 </a:solidFill>
                 <a:latin typeface="Arial"/>
               </a:rPr>
-              <a:t>Cliquez pour </a:t>
-            </a:r>
-            <a:r>
-              <a:rPr b="0" lang="fr-FR" sz="4400" spc="-1" strike="noStrike">
-                <a:solidFill>
-                  <a:srgbClr val="000000"/>
-                </a:solidFill>
-                <a:latin typeface="Arial"/>
-              </a:rPr>
-              <a:t>éditer le </a:t>
-            </a:r>
-            <a:r>
-              <a:rPr b="0" lang="fr-FR" sz="4400" spc="-1" strike="noStrike">
-                <a:solidFill>
-                  <a:srgbClr val="000000"/>
-                </a:solidFill>
-                <a:latin typeface="Arial"/>
-              </a:rPr>
-              <a:t>format du </a:t>
-            </a:r>
-            <a:r>
-              <a:rPr b="0" lang="fr-FR" sz="4400" spc="-1" strike="noStrike">
-                <a:solidFill>
-                  <a:srgbClr val="000000"/>
-                </a:solidFill>
-                <a:latin typeface="Arial"/>
-              </a:rPr>
-              <a:t>texte-titre</a:t>
+              <a:t>Cliquez pour éditer le format du texte-titre</a:t>
             </a:r>
             <a:endParaRPr b="0" lang="fr-FR" sz="4400" spc="-1" strike="noStrike">
               <a:solidFill>
@@ -3620,7 +3413,7 @@
                 <a:latin typeface="Calibri"/>
                 <a:ea typeface="Calibri"/>
               </a:rPr>
-              <a:t>Dashboards, visualisations, filtres, partage</a:t>
+              <a:t>Query Languages, Dashboards, visualisations, filtres, partage</a:t>
             </a:r>
             <a:endParaRPr b="0" lang="fr-FR" sz="1050" spc="-1" strike="noStrike">
               <a:solidFill>
